--- a/dist/초6/수학/연산과비례/초6_수학_연산과비례_08_비례배분_학생용.pptx
+++ b/dist/초6/수학/연산과비례/초6_수학_연산과비례_08_비례배분_학생용.pptx
@@ -119,20 +119,20 @@
   <p:extLst>
     <p:ext uri="{521415D9-36F7-43E2-AB2F-B90AF26B5E84}">
       <p14:sectionLst xmlns:p14="http://schemas.microsoft.com/office/powerpoint/2010/main">
-        <p14:section name="도입" id="{fb51f4e9-ebb7-81e1-e8ca-4a26e22728eb}">
+        <p14:section name="도입" id="{cc4ec7e5-0e4c-ad12-d51b-213ec18a0b62}">
           <p14:sldIdLst>
             <p14:sldId id="256"/>
             <p14:sldId id="257"/>
           </p14:sldIdLst>
         </p14:section>
-        <p14:section name="개념" id="{6632d8ad-c451-fcaf-fa5c-aafda332012b}">
+        <p14:section name="개념" id="{9ca5fc36-e8ac-4df0-a9f5-13614d555433}">
           <p14:sldIdLst>
             <p14:sldId id="258"/>
             <p14:sldId id="259"/>
             <p14:sldId id="262"/>
           </p14:sldIdLst>
         </p14:section>
-        <p14:section name="연습" id="{814b7518-8b38-13c7-cb8a-9a5bfa5ffbfb}">
+        <p14:section name="연습" id="{81512f3d-9bd7-d47f-c564-b82569f57312}">
           <p14:sldIdLst>
             <p14:sldId id="260"/>
             <p14:sldId id="261"/>
@@ -140,24 +140,24 @@
             <p14:sldId id="264"/>
           </p14:sldIdLst>
         </p14:section>
-        <p14:section name="개념" id="{368a15c4-4628-e50c-02e9-a1359a08924b}">
+        <p14:section name="개념" id="{0cccb772-3243-7087-6597-a7c203eee4cb}">
           <p14:sldIdLst/>
         </p14:section>
-        <p14:section name="연습" id="{ed139832-70c3-a169-d4ad-5dc18a867756}">
+        <p14:section name="연습" id="{8ea2286f-41a4-ffe9-7f98-4c83c17ef1d4}">
           <p14:sldIdLst/>
         </p14:section>
-        <p14:section name="확인" id="{8ef73691-d466-e22b-5eeb-5fdbfbe5ba6a}">
+        <p14:section name="확인" id="{0535dcab-8f7f-3c35-7d83-58e345e713fc}">
           <p14:sldIdLst>
             <p14:sldId id="265"/>
             <p14:sldId id="266"/>
           </p14:sldIdLst>
         </p14:section>
-        <p14:section name="정리" id="{b15e0821-3d71-72f3-67c7-2574d6546e15}">
+        <p14:section name="정리" id="{24fa627c-f6eb-753a-3811-320babb9844e}">
           <p14:sldIdLst>
             <p14:sldId id="267"/>
           </p14:sldIdLst>
         </p14:section>
-        <p14:section name="보충" id="{be2442ad-bff8-e634-344a-cf776dd5ffa6}">
+        <p14:section name="보충" id="{a6d1511e-2d61-1b71-4a12-9280f4f5a92b}">
           <p14:sldIdLst>
             <p14:sldId id="268"/>
           </p14:sldIdLst>
@@ -3397,7 +3397,7 @@
                 <a:ea typeface="맑은 고딕" pitchFamily="34" charset="-122"/>
                 <a:cs typeface="맑은 고딕" pitchFamily="34" charset="-120"/>
               </a:rPr>
-              <a:t>둘레 36 cm,</a:t>
+              <a:t>둘레 36 cm,</a:t>
             </a:r>
             <a:endParaRPr lang="ko-KR" sz="2800" dirty="0"/>
           </a:p>
@@ -4429,7 +4429,7 @@
                 <a:ea typeface="맑은 고딕" pitchFamily="34" charset="-122"/>
                 <a:cs typeface="맑은 고딕" pitchFamily="34" charset="-120"/>
               </a:rPr>
-              <a:t>③ 둘레 50 cm,</a:t>
+              <a:t>③ 둘레 50 cm,</a:t>
             </a:r>
             <a:endParaRPr lang="ko-KR" sz="2200" dirty="0"/>
           </a:p>
@@ -8703,7 +8703,7 @@
                 <a:ea typeface="맑은 고딕" pitchFamily="34" charset="-122"/>
                 <a:cs typeface="맑은 고딕" pitchFamily="34" charset="-120"/>
               </a:rPr>
-              <a:t>둘레가 60 cm, 가로 : 세로 = 3 : 2예요.</a:t>
+              <a:t>둘레가 60 cm, 가로 : 세로 = 3 : 2예요.</a:t>
             </a:r>
             <a:endParaRPr lang="ko-KR" sz="2800" dirty="0"/>
           </a:p>
@@ -9382,7 +9382,7 @@
                 <a:ea typeface="맑은 고딕" pitchFamily="34" charset="-122"/>
                 <a:cs typeface="맑은 고딕" pitchFamily="34" charset="-120"/>
               </a:rPr>
-              <a:t>둘레가 40 cm, 가로 : 세로 = 3 : 1인 직사각형을 그려요.</a:t>
+              <a:t>둘레가 40 cm, 가로 : 세로 = 3 : 1인 직사각형을 그려요.</a:t>
             </a:r>
             <a:endParaRPr lang="ko-KR" sz="2800" dirty="0"/>
           </a:p>
@@ -9498,7 +9498,7 @@
                 <a:ea typeface="맑은 고딕" pitchFamily="34" charset="-122"/>
                 <a:cs typeface="맑은 고딕" pitchFamily="34" charset="-120"/>
               </a:rPr>
-              <a:t>토끼: 가로 30 cm</a:t>
+              <a:t>토끼: 가로 30 cm</a:t>
             </a:r>
             <a:endParaRPr lang="ko-KR" sz="2200" dirty="0"/>
           </a:p>
@@ -9601,7 +9601,7 @@
                 <a:ea typeface="맑은 고딕" pitchFamily="34" charset="-122"/>
                 <a:cs typeface="맑은 고딕" pitchFamily="34" charset="-120"/>
               </a:rPr>
-              <a:t>곰: 가로 15 cm</a:t>
+              <a:t>곰: 가로 15 cm</a:t>
             </a:r>
             <a:endParaRPr lang="ko-KR" sz="2200" dirty="0"/>
           </a:p>
@@ -10046,7 +10046,7 @@
                 <a:ea typeface="맑은 고딕" pitchFamily="34" charset="-122"/>
                 <a:cs typeface="맑은 고딕" pitchFamily="34" charset="-120"/>
               </a:rPr>
-              <a:t>끈 2 m를 3 : 2로 자르면</a:t>
+              <a:t>끈 2 m를 3 : 2로 자르면</a:t>
             </a:r>
             <a:endParaRPr lang="ko-KR" sz="2800" dirty="0"/>
           </a:p>
@@ -10149,7 +10149,7 @@
                 <a:ea typeface="맑은 고딕" pitchFamily="34" charset="-122"/>
                 <a:cs typeface="맑은 고딕" pitchFamily="34" charset="-120"/>
               </a:rPr>
-              <a:t>둘레가 56 cm, 가로 : 세로 = 4 : 3인</a:t>
+              <a:t>둘레가 56 cm, 가로 : 세로 = 4 : 3인</a:t>
             </a:r>
             <a:endParaRPr lang="ko-KR" sz="2800" dirty="0"/>
           </a:p>
